--- a/Dokumentumok/VizsgaremekPPT.pptx
+++ b/Dokumentumok/VizsgaremekPPT.pptx
@@ -235,7 +235,7 @@
           <a:p>
             <a:fld id="{AC408AAD-6BE8-4646-91F0-75404E4B9A06}" type="datetimeFigureOut">
               <a:rPr lang="hu-HU" smtClean="0"/>
-              <a:t>2026. 05. 19.</a:t>
+              <a:t>2026. 05. 21.</a:t>
             </a:fld>
             <a:endParaRPr lang="hu-HU"/>
           </a:p>
@@ -638,9 +638,8 @@
                 <a:latin typeface="Arial" panose="020B0604020202020204" pitchFamily="34" charset="0"/>
                 <a:cs typeface="Arial" panose="020B0604020202020204" pitchFamily="34" charset="0"/>
               </a:rPr>
-              <a:t> Célkitűzés 2. pont: (pl. regisztráltak, elégedett ügyfelek száma).</a:t>
+              <a:t> Célkitűzés 2. pont: (pl. regisztráltak, elégedett ügyfelek száma). </a:t>
             </a:r>
-            <a:endParaRPr lang="hu-HU" dirty="0"/>
           </a:p>
         </p:txBody>
       </p:sp>
@@ -1271,7 +1270,7 @@
           <a:p>
             <a:fld id="{AE81708B-DA75-4ED8-9E3C-56C7A32F773F}" type="datetimeFigureOut">
               <a:rPr lang="hu-HU" smtClean="0"/>
-              <a:t>2026. 05. 19.</a:t>
+              <a:t>2026. 05. 21.</a:t>
             </a:fld>
             <a:endParaRPr lang="hu-HU"/>
           </a:p>
@@ -1469,7 +1468,7 @@
           <a:p>
             <a:fld id="{AE81708B-DA75-4ED8-9E3C-56C7A32F773F}" type="datetimeFigureOut">
               <a:rPr lang="hu-HU" smtClean="0"/>
-              <a:t>2026. 05. 19.</a:t>
+              <a:t>2026. 05. 21.</a:t>
             </a:fld>
             <a:endParaRPr lang="hu-HU"/>
           </a:p>
@@ -1677,7 +1676,7 @@
           <a:p>
             <a:fld id="{AE81708B-DA75-4ED8-9E3C-56C7A32F773F}" type="datetimeFigureOut">
               <a:rPr lang="hu-HU" smtClean="0"/>
-              <a:t>2026. 05. 19.</a:t>
+              <a:t>2026. 05. 21.</a:t>
             </a:fld>
             <a:endParaRPr lang="hu-HU"/>
           </a:p>
@@ -1875,7 +1874,7 @@
           <a:p>
             <a:fld id="{AE81708B-DA75-4ED8-9E3C-56C7A32F773F}" type="datetimeFigureOut">
               <a:rPr lang="hu-HU" smtClean="0"/>
-              <a:t>2026. 05. 19.</a:t>
+              <a:t>2026. 05. 21.</a:t>
             </a:fld>
             <a:endParaRPr lang="hu-HU"/>
           </a:p>
@@ -2150,7 +2149,7 @@
           <a:p>
             <a:fld id="{AE81708B-DA75-4ED8-9E3C-56C7A32F773F}" type="datetimeFigureOut">
               <a:rPr lang="hu-HU" smtClean="0"/>
-              <a:t>2026. 05. 19.</a:t>
+              <a:t>2026. 05. 21.</a:t>
             </a:fld>
             <a:endParaRPr lang="hu-HU"/>
           </a:p>
@@ -2415,7 +2414,7 @@
           <a:p>
             <a:fld id="{AE81708B-DA75-4ED8-9E3C-56C7A32F773F}" type="datetimeFigureOut">
               <a:rPr lang="hu-HU" smtClean="0"/>
-              <a:t>2026. 05. 19.</a:t>
+              <a:t>2026. 05. 21.</a:t>
             </a:fld>
             <a:endParaRPr lang="hu-HU"/>
           </a:p>
@@ -2827,7 +2826,7 @@
           <a:p>
             <a:fld id="{AE81708B-DA75-4ED8-9E3C-56C7A32F773F}" type="datetimeFigureOut">
               <a:rPr lang="hu-HU" smtClean="0"/>
-              <a:t>2026. 05. 19.</a:t>
+              <a:t>2026. 05. 21.</a:t>
             </a:fld>
             <a:endParaRPr lang="hu-HU"/>
           </a:p>
@@ -2968,7 +2967,7 @@
           <a:p>
             <a:fld id="{AE81708B-DA75-4ED8-9E3C-56C7A32F773F}" type="datetimeFigureOut">
               <a:rPr lang="hu-HU" smtClean="0"/>
-              <a:t>2026. 05. 19.</a:t>
+              <a:t>2026. 05. 21.</a:t>
             </a:fld>
             <a:endParaRPr lang="hu-HU"/>
           </a:p>
@@ -3081,7 +3080,7 @@
           <a:p>
             <a:fld id="{AE81708B-DA75-4ED8-9E3C-56C7A32F773F}" type="datetimeFigureOut">
               <a:rPr lang="hu-HU" smtClean="0"/>
-              <a:t>2026. 05. 19.</a:t>
+              <a:t>2026. 05. 21.</a:t>
             </a:fld>
             <a:endParaRPr lang="hu-HU"/>
           </a:p>
@@ -3392,7 +3391,7 @@
           <a:p>
             <a:fld id="{AE81708B-DA75-4ED8-9E3C-56C7A32F773F}" type="datetimeFigureOut">
               <a:rPr lang="hu-HU" smtClean="0"/>
-              <a:t>2026. 05. 19.</a:t>
+              <a:t>2026. 05. 21.</a:t>
             </a:fld>
             <a:endParaRPr lang="hu-HU"/>
           </a:p>
@@ -3680,7 +3679,7 @@
           <a:p>
             <a:fld id="{AE81708B-DA75-4ED8-9E3C-56C7A32F773F}" type="datetimeFigureOut">
               <a:rPr lang="hu-HU" smtClean="0"/>
-              <a:t>2026. 05. 19.</a:t>
+              <a:t>2026. 05. 21.</a:t>
             </a:fld>
             <a:endParaRPr lang="hu-HU"/>
           </a:p>
@@ -3921,7 +3920,7 @@
           <a:p>
             <a:fld id="{AE81708B-DA75-4ED8-9E3C-56C7A32F773F}" type="datetimeFigureOut">
               <a:rPr lang="hu-HU" smtClean="0"/>
-              <a:t>2026. 05. 19.</a:t>
+              <a:t>2026. 05. 21.</a:t>
             </a:fld>
             <a:endParaRPr lang="hu-HU"/>
           </a:p>
@@ -13371,146 +13370,6 @@
           </a:prstGeom>
         </p:spPr>
       </p:pic>
-      <p:pic>
-        <p:nvPicPr>
-          <p:cNvPr id="43" name="Kép 42">
-            <a:extLst>
-              <a:ext uri="{FF2B5EF4-FFF2-40B4-BE49-F238E27FC236}">
-                <a16:creationId xmlns:a16="http://schemas.microsoft.com/office/drawing/2014/main" id="{E5CA6F0F-04E0-86B0-796E-47AF91D06BC4}"/>
-              </a:ext>
-            </a:extLst>
-          </p:cNvPr>
-          <p:cNvPicPr>
-            <a:picLocks noChangeAspect="1"/>
-          </p:cNvPicPr>
-          <p:nvPr/>
-        </p:nvPicPr>
-        <p:blipFill>
-          <a:blip r:embed="rId4">
-            <a:extLst>
-              <a:ext uri="{28A0092B-C50C-407E-A947-70E740481C1C}">
-                <a14:useLocalDpi xmlns:a14="http://schemas.microsoft.com/office/drawing/2010/main" val="0"/>
-              </a:ext>
-            </a:extLst>
-          </a:blip>
-          <a:stretch>
-            <a:fillRect/>
-          </a:stretch>
-        </p:blipFill>
-        <p:spPr>
-          <a:xfrm>
-            <a:off x="14511498" y="1638120"/>
-            <a:ext cx="1877060" cy="3548380"/>
-          </a:xfrm>
-          <a:prstGeom prst="rect">
-            <a:avLst/>
-          </a:prstGeom>
-        </p:spPr>
-      </p:pic>
-      <p:pic>
-        <p:nvPicPr>
-          <p:cNvPr id="44" name="Kép 43">
-            <a:extLst>
-              <a:ext uri="{FF2B5EF4-FFF2-40B4-BE49-F238E27FC236}">
-                <a16:creationId xmlns:a16="http://schemas.microsoft.com/office/drawing/2014/main" id="{1C2DA719-DC92-AC26-E7E7-231AB810B04B}"/>
-              </a:ext>
-            </a:extLst>
-          </p:cNvPr>
-          <p:cNvPicPr>
-            <a:picLocks noChangeAspect="1"/>
-          </p:cNvPicPr>
-          <p:nvPr/>
-        </p:nvPicPr>
-        <p:blipFill>
-          <a:blip r:embed="rId5">
-            <a:extLst>
-              <a:ext uri="{28A0092B-C50C-407E-A947-70E740481C1C}">
-                <a14:useLocalDpi xmlns:a14="http://schemas.microsoft.com/office/drawing/2010/main" val="0"/>
-              </a:ext>
-            </a:extLst>
-          </a:blip>
-          <a:stretch>
-            <a:fillRect/>
-          </a:stretch>
-        </p:blipFill>
-        <p:spPr>
-          <a:xfrm>
-            <a:off x="16515732" y="2229940"/>
-            <a:ext cx="2235200" cy="2956560"/>
-          </a:xfrm>
-          <a:prstGeom prst="rect">
-            <a:avLst/>
-          </a:prstGeom>
-          <a:effectLst/>
-        </p:spPr>
-      </p:pic>
-      <p:pic>
-        <p:nvPicPr>
-          <p:cNvPr id="45" name="Kép 44">
-            <a:extLst>
-              <a:ext uri="{FF2B5EF4-FFF2-40B4-BE49-F238E27FC236}">
-                <a16:creationId xmlns:a16="http://schemas.microsoft.com/office/drawing/2014/main" id="{7852D93F-D379-11E0-30D1-26E6975840B8}"/>
-              </a:ext>
-            </a:extLst>
-          </p:cNvPr>
-          <p:cNvPicPr>
-            <a:picLocks noChangeAspect="1"/>
-          </p:cNvPicPr>
-          <p:nvPr/>
-        </p:nvPicPr>
-        <p:blipFill>
-          <a:blip r:embed="rId6"/>
-          <a:stretch>
-            <a:fillRect/>
-          </a:stretch>
-        </p:blipFill>
-        <p:spPr>
-          <a:xfrm>
-            <a:off x="18878106" y="2229940"/>
-            <a:ext cx="2630069" cy="2956560"/>
-          </a:xfrm>
-          <a:prstGeom prst="rect">
-            <a:avLst/>
-          </a:prstGeom>
-        </p:spPr>
-      </p:pic>
-      <p:pic>
-        <p:nvPicPr>
-          <p:cNvPr id="46" name="Kép 45">
-            <a:extLst>
-              <a:ext uri="{FF2B5EF4-FFF2-40B4-BE49-F238E27FC236}">
-                <a16:creationId xmlns:a16="http://schemas.microsoft.com/office/drawing/2014/main" id="{A9805D96-BBE5-CCD3-2DA3-2001A170BE57}"/>
-              </a:ext>
-            </a:extLst>
-          </p:cNvPr>
-          <p:cNvPicPr>
-            <a:picLocks noChangeAspect="1"/>
-          </p:cNvPicPr>
-          <p:nvPr/>
-        </p:nvPicPr>
-        <p:blipFill>
-          <a:blip r:embed="rId7">
-            <a:extLst>
-              <a:ext uri="{28A0092B-C50C-407E-A947-70E740481C1C}">
-                <a14:useLocalDpi xmlns:a14="http://schemas.microsoft.com/office/drawing/2010/main" val="0"/>
-              </a:ext>
-            </a:extLst>
-          </a:blip>
-          <a:stretch>
-            <a:fillRect/>
-          </a:stretch>
-        </p:blipFill>
-        <p:spPr>
-          <a:xfrm>
-            <a:off x="21635349" y="2866845"/>
-            <a:ext cx="2236470" cy="2319655"/>
-          </a:xfrm>
-          <a:prstGeom prst="rect">
-            <a:avLst/>
-          </a:prstGeom>
-          <a:effectLst/>
-        </p:spPr>
-      </p:pic>
       <p:sp>
         <p:nvSpPr>
           <p:cNvPr id="26" name="Szabadkézi sokszög: alakzat 25">
@@ -13872,7 +13731,7 @@
           <a:blip>
             <a:extLst>
               <a:ext uri="{96DAC541-7B7A-43D3-8B79-37D633B846F1}">
-                <asvg:svgBlip xmlns:asvg="http://schemas.microsoft.com/office/drawing/2016/SVG/main" r:embed="rId8"/>
+                <asvg:svgBlip xmlns:asvg="http://schemas.microsoft.com/office/drawing/2016/SVG/main" r:embed="rId4"/>
               </a:ext>
             </a:extLst>
           </a:blip>
@@ -13908,7 +13767,7 @@
           <a:blip>
             <a:extLst>
               <a:ext uri="{96DAC541-7B7A-43D3-8B79-37D633B846F1}">
-                <asvg:svgBlip xmlns:asvg="http://schemas.microsoft.com/office/drawing/2016/SVG/main" r:embed="rId9"/>
+                <asvg:svgBlip xmlns:asvg="http://schemas.microsoft.com/office/drawing/2016/SVG/main" r:embed="rId5"/>
               </a:ext>
             </a:extLst>
           </a:blip>
@@ -13967,7 +13826,7 @@
             <a:blip>
               <a:extLst>
                 <a:ext uri="{96DAC541-7B7A-43D3-8B79-37D633B846F1}">
-                  <asvg:svgBlip xmlns:asvg="http://schemas.microsoft.com/office/drawing/2016/SVG/main" r:embed="rId10"/>
+                  <asvg:svgBlip xmlns:asvg="http://schemas.microsoft.com/office/drawing/2016/SVG/main" r:embed="rId6"/>
                 </a:ext>
               </a:extLst>
             </a:blip>
@@ -14003,7 +13862,7 @@
             <a:blip>
               <a:extLst>
                 <a:ext uri="{96DAC541-7B7A-43D3-8B79-37D633B846F1}">
-                  <asvg:svgBlip xmlns:asvg="http://schemas.microsoft.com/office/drawing/2016/SVG/main" r:embed="rId11"/>
+                  <asvg:svgBlip xmlns:asvg="http://schemas.microsoft.com/office/drawing/2016/SVG/main" r:embed="rId7"/>
                 </a:ext>
               </a:extLst>
             </a:blip>
@@ -14040,7 +13899,7 @@
           <a:blip>
             <a:extLst>
               <a:ext uri="{96DAC541-7B7A-43D3-8B79-37D633B846F1}">
-                <asvg:svgBlip xmlns:asvg="http://schemas.microsoft.com/office/drawing/2016/SVG/main" r:embed="rId12"/>
+                <asvg:svgBlip xmlns:asvg="http://schemas.microsoft.com/office/drawing/2016/SVG/main" r:embed="rId8"/>
               </a:ext>
             </a:extLst>
           </a:blip>
@@ -14076,7 +13935,7 @@
           <a:blip>
             <a:extLst>
               <a:ext uri="{96DAC541-7B7A-43D3-8B79-37D633B846F1}">
-                <asvg:svgBlip xmlns:asvg="http://schemas.microsoft.com/office/drawing/2016/SVG/main" r:embed="rId13"/>
+                <asvg:svgBlip xmlns:asvg="http://schemas.microsoft.com/office/drawing/2016/SVG/main" r:embed="rId9"/>
               </a:ext>
             </a:extLst>
           </a:blip>
@@ -14690,7 +14549,7 @@
       <p:pic>
         <p:nvPicPr>
           <p:cNvPr id="36" name="Ábra 35" descr="Telitalálat egyszínű kitöltéssel">
-            <a:hlinkClick r:id="rId14" action="ppaction://hlinksldjump"/>
+            <a:hlinkClick r:id="rId10" action="ppaction://hlinksldjump"/>
             <a:extLst>
               <a:ext uri="{FF2B5EF4-FFF2-40B4-BE49-F238E27FC236}">
                 <a16:creationId xmlns:a16="http://schemas.microsoft.com/office/drawing/2014/main" id="{30357E96-7497-9BE6-2BBE-C94655579EE6}"/>
@@ -14706,7 +14565,7 @@
           <a:blip>
             <a:extLst>
               <a:ext uri="{96DAC541-7B7A-43D3-8B79-37D633B846F1}">
-                <asvg:svgBlip xmlns:asvg="http://schemas.microsoft.com/office/drawing/2016/SVG/main" r:embed="rId15"/>
+                <asvg:svgBlip xmlns:asvg="http://schemas.microsoft.com/office/drawing/2016/SVG/main" r:embed="rId11"/>
               </a:ext>
             </a:extLst>
           </a:blip>
@@ -14727,7 +14586,7 @@
       <p:pic>
         <p:nvPicPr>
           <p:cNvPr id="38" name="Ábra 37" descr="Villám egyszínű kitöltéssel">
-            <a:hlinkClick r:id="rId16" action="ppaction://hlinksldjump"/>
+            <a:hlinkClick r:id="rId12" action="ppaction://hlinksldjump"/>
             <a:extLst>
               <a:ext uri="{FF2B5EF4-FFF2-40B4-BE49-F238E27FC236}">
                 <a16:creationId xmlns:a16="http://schemas.microsoft.com/office/drawing/2014/main" id="{638D394D-4973-FC52-42FC-CE5579610EE0}"/>
@@ -14743,7 +14602,7 @@
           <a:blip>
             <a:extLst>
               <a:ext uri="{96DAC541-7B7A-43D3-8B79-37D633B846F1}">
-                <asvg:svgBlip xmlns:asvg="http://schemas.microsoft.com/office/drawing/2016/SVG/main" r:embed="rId17"/>
+                <asvg:svgBlip xmlns:asvg="http://schemas.microsoft.com/office/drawing/2016/SVG/main" r:embed="rId13"/>
               </a:ext>
             </a:extLst>
           </a:blip>
@@ -14804,7 +14663,7 @@
             <a:blip>
               <a:extLst>
                 <a:ext uri="{96DAC541-7B7A-43D3-8B79-37D633B846F1}">
-                  <asvg:svgBlip xmlns:asvg="http://schemas.microsoft.com/office/drawing/2016/SVG/main" r:embed="rId18"/>
+                  <asvg:svgBlip xmlns:asvg="http://schemas.microsoft.com/office/drawing/2016/SVG/main" r:embed="rId14"/>
                 </a:ext>
               </a:extLst>
             </a:blip>
@@ -14825,7 +14684,7 @@
         <p:pic>
           <p:nvPicPr>
             <p:cNvPr id="42" name="Ábra 41" descr="Villanykörte és fogaskerék egyszínű kitöltéssel">
-              <a:hlinkClick r:id="rId19" action="ppaction://hlinksldjump"/>
+              <a:hlinkClick r:id="rId15" action="ppaction://hlinksldjump"/>
               <a:extLst>
                 <a:ext uri="{FF2B5EF4-FFF2-40B4-BE49-F238E27FC236}">
                   <a16:creationId xmlns:a16="http://schemas.microsoft.com/office/drawing/2014/main" id="{2BD3109B-0A7B-8EBE-8B18-98930B3FAE33}"/>
@@ -14841,7 +14700,7 @@
             <a:blip>
               <a:extLst>
                 <a:ext uri="{96DAC541-7B7A-43D3-8B79-37D633B846F1}">
-                  <asvg:svgBlip xmlns:asvg="http://schemas.microsoft.com/office/drawing/2016/SVG/main" r:embed="rId20"/>
+                  <asvg:svgBlip xmlns:asvg="http://schemas.microsoft.com/office/drawing/2016/SVG/main" r:embed="rId16"/>
                 </a:ext>
               </a:extLst>
             </a:blip>
@@ -14863,7 +14722,7 @@
       <p:pic>
         <p:nvPicPr>
           <p:cNvPr id="53" name="Ábra 52" descr="Dokumentum egyszínű kitöltéssel">
-            <a:hlinkClick r:id="rId21" action="ppaction://hlinksldjump"/>
+            <a:hlinkClick r:id="rId17" action="ppaction://hlinksldjump"/>
             <a:extLst>
               <a:ext uri="{FF2B5EF4-FFF2-40B4-BE49-F238E27FC236}">
                 <a16:creationId xmlns:a16="http://schemas.microsoft.com/office/drawing/2014/main" id="{7CD531B5-3CCA-D49F-D52F-693232AE0D37}"/>
@@ -14879,7 +14738,7 @@
           <a:blip>
             <a:extLst>
               <a:ext uri="{96DAC541-7B7A-43D3-8B79-37D633B846F1}">
-                <asvg:svgBlip xmlns:asvg="http://schemas.microsoft.com/office/drawing/2016/SVG/main" r:embed="rId22"/>
+                <asvg:svgBlip xmlns:asvg="http://schemas.microsoft.com/office/drawing/2016/SVG/main" r:embed="rId18"/>
               </a:ext>
             </a:extLst>
           </a:blip>
@@ -14895,6 +14754,110 @@
           <a:prstGeom prst="rect">
             <a:avLst/>
           </a:prstGeom>
+        </p:spPr>
+      </p:pic>
+      <p:pic>
+        <p:nvPicPr>
+          <p:cNvPr id="2" name="Kép 1">
+            <a:extLst>
+              <a:ext uri="{FF2B5EF4-FFF2-40B4-BE49-F238E27FC236}">
+                <a16:creationId xmlns:a16="http://schemas.microsoft.com/office/drawing/2014/main" id="{38D79D50-A9A2-9455-5ED1-57489435B9FE}"/>
+              </a:ext>
+            </a:extLst>
+          </p:cNvPr>
+          <p:cNvPicPr>
+            <a:picLocks noChangeAspect="1"/>
+          </p:cNvPicPr>
+          <p:nvPr/>
+        </p:nvPicPr>
+        <p:blipFill>
+          <a:blip r:embed="rId19">
+            <a:extLst>
+              <a:ext uri="{28A0092B-C50C-407E-A947-70E740481C1C}">
+                <a14:useLocalDpi xmlns:a14="http://schemas.microsoft.com/office/drawing/2010/main" val="0"/>
+              </a:ext>
+            </a:extLst>
+          </a:blip>
+          <a:stretch>
+            <a:fillRect/>
+          </a:stretch>
+        </p:blipFill>
+        <p:spPr>
+          <a:xfrm>
+            <a:off x="13730314" y="1791112"/>
+            <a:ext cx="2923990" cy="3867642"/>
+          </a:xfrm>
+          <a:prstGeom prst="rect">
+            <a:avLst/>
+          </a:prstGeom>
+          <a:effectLst/>
+        </p:spPr>
+      </p:pic>
+      <p:pic>
+        <p:nvPicPr>
+          <p:cNvPr id="3" name="Kép 2">
+            <a:extLst>
+              <a:ext uri="{FF2B5EF4-FFF2-40B4-BE49-F238E27FC236}">
+                <a16:creationId xmlns:a16="http://schemas.microsoft.com/office/drawing/2014/main" id="{8EFC3A18-5178-3845-ACA6-A321559AEBC1}"/>
+              </a:ext>
+            </a:extLst>
+          </p:cNvPr>
+          <p:cNvPicPr>
+            <a:picLocks noChangeAspect="1"/>
+          </p:cNvPicPr>
+          <p:nvPr/>
+        </p:nvPicPr>
+        <p:blipFill>
+          <a:blip r:embed="rId20"/>
+          <a:stretch>
+            <a:fillRect/>
+          </a:stretch>
+        </p:blipFill>
+        <p:spPr>
+          <a:xfrm>
+            <a:off x="16745468" y="1791112"/>
+            <a:ext cx="3440542" cy="3867642"/>
+          </a:xfrm>
+          <a:prstGeom prst="rect">
+            <a:avLst/>
+          </a:prstGeom>
+        </p:spPr>
+      </p:pic>
+      <p:pic>
+        <p:nvPicPr>
+          <p:cNvPr id="4" name="Kép 3">
+            <a:extLst>
+              <a:ext uri="{FF2B5EF4-FFF2-40B4-BE49-F238E27FC236}">
+                <a16:creationId xmlns:a16="http://schemas.microsoft.com/office/drawing/2014/main" id="{7F53AF58-FFFC-E2C2-6B7B-B6728CB9CB1C}"/>
+              </a:ext>
+            </a:extLst>
+          </p:cNvPr>
+          <p:cNvPicPr>
+            <a:picLocks noChangeAspect="1"/>
+          </p:cNvPicPr>
+          <p:nvPr/>
+        </p:nvPicPr>
+        <p:blipFill>
+          <a:blip r:embed="rId21">
+            <a:extLst>
+              <a:ext uri="{28A0092B-C50C-407E-A947-70E740481C1C}">
+                <a14:useLocalDpi xmlns:a14="http://schemas.microsoft.com/office/drawing/2010/main" val="0"/>
+              </a:ext>
+            </a:extLst>
+          </a:blip>
+          <a:stretch>
+            <a:fillRect/>
+          </a:stretch>
+        </p:blipFill>
+        <p:spPr>
+          <a:xfrm>
+            <a:off x="20277174" y="2621926"/>
+            <a:ext cx="2925652" cy="3034470"/>
+          </a:xfrm>
+          <a:prstGeom prst="rect">
+            <a:avLst/>
+          </a:prstGeom>
+          <a:effectLst/>
         </p:spPr>
       </p:pic>
     </p:spTree>
@@ -15398,10 +15361,10 @@
       </p:sp>
       <p:pic>
         <p:nvPicPr>
-          <p:cNvPr id="5" name="Kép 4">
-            <a:extLst>
-              <a:ext uri="{FF2B5EF4-FFF2-40B4-BE49-F238E27FC236}">
-                <a16:creationId xmlns:a16="http://schemas.microsoft.com/office/drawing/2014/main" id="{2247DE4B-F680-5D0B-201F-F575EF38992C}"/>
+          <p:cNvPr id="12" name="Kép 11">
+            <a:extLst>
+              <a:ext uri="{FF2B5EF4-FFF2-40B4-BE49-F238E27FC236}">
+                <a16:creationId xmlns:a16="http://schemas.microsoft.com/office/drawing/2014/main" id="{8FDBE332-2FAF-7BD5-7539-34176E3D1491}"/>
               </a:ext>
             </a:extLst>
           </p:cNvPr>
@@ -15424,44 +15387,8 @@
         </p:blipFill>
         <p:spPr>
           <a:xfrm>
-            <a:off x="2200441" y="1638120"/>
-            <a:ext cx="1877060" cy="3548380"/>
-          </a:xfrm>
-          <a:prstGeom prst="rect">
-            <a:avLst/>
-          </a:prstGeom>
-        </p:spPr>
-      </p:pic>
-      <p:pic>
-        <p:nvPicPr>
-          <p:cNvPr id="12" name="Kép 11">
-            <a:extLst>
-              <a:ext uri="{FF2B5EF4-FFF2-40B4-BE49-F238E27FC236}">
-                <a16:creationId xmlns:a16="http://schemas.microsoft.com/office/drawing/2014/main" id="{8FDBE332-2FAF-7BD5-7539-34176E3D1491}"/>
-              </a:ext>
-            </a:extLst>
-          </p:cNvPr>
-          <p:cNvPicPr>
-            <a:picLocks noChangeAspect="1"/>
-          </p:cNvPicPr>
-          <p:nvPr/>
-        </p:nvPicPr>
-        <p:blipFill>
-          <a:blip r:embed="rId5">
-            <a:extLst>
-              <a:ext uri="{28A0092B-C50C-407E-A947-70E740481C1C}">
-                <a14:useLocalDpi xmlns:a14="http://schemas.microsoft.com/office/drawing/2010/main" val="0"/>
-              </a:ext>
-            </a:extLst>
-          </a:blip>
-          <a:stretch>
-            <a:fillRect/>
-          </a:stretch>
-        </p:blipFill>
-        <p:spPr>
-          <a:xfrm>
-            <a:off x="4204675" y="2229940"/>
-            <a:ext cx="2235200" cy="2956560"/>
+            <a:off x="2092977" y="1791112"/>
+            <a:ext cx="2923990" cy="3867642"/>
           </a:xfrm>
           <a:prstGeom prst="rect">
             <a:avLst/>
@@ -15484,15 +15411,15 @@
           <p:nvPr/>
         </p:nvPicPr>
         <p:blipFill>
-          <a:blip r:embed="rId6"/>
+          <a:blip r:embed="rId5"/>
           <a:stretch>
             <a:fillRect/>
           </a:stretch>
         </p:blipFill>
         <p:spPr>
           <a:xfrm>
-            <a:off x="6567049" y="2229940"/>
-            <a:ext cx="2630069" cy="2956560"/>
+            <a:off x="5108131" y="1791112"/>
+            <a:ext cx="3440542" cy="3867642"/>
           </a:xfrm>
           <a:prstGeom prst="rect">
             <a:avLst/>
@@ -15514,7 +15441,7 @@
           <p:nvPr/>
         </p:nvPicPr>
         <p:blipFill>
-          <a:blip r:embed="rId7">
+          <a:blip r:embed="rId6">
             <a:extLst>
               <a:ext uri="{28A0092B-C50C-407E-A947-70E740481C1C}">
                 <a14:useLocalDpi xmlns:a14="http://schemas.microsoft.com/office/drawing/2010/main" val="0"/>
@@ -15527,8 +15454,8 @@
         </p:blipFill>
         <p:spPr>
           <a:xfrm>
-            <a:off x="9324292" y="2866845"/>
-            <a:ext cx="2236470" cy="2319655"/>
+            <a:off x="8639837" y="2621926"/>
+            <a:ext cx="2925652" cy="3034470"/>
           </a:xfrm>
           <a:prstGeom prst="rect">
             <a:avLst/>
@@ -15554,7 +15481,7 @@
           <a:blip>
             <a:extLst>
               <a:ext uri="{96DAC541-7B7A-43D3-8B79-37D633B846F1}">
-                <asvg:svgBlip xmlns:asvg="http://schemas.microsoft.com/office/drawing/2016/SVG/main" r:embed="rId8"/>
+                <asvg:svgBlip xmlns:asvg="http://schemas.microsoft.com/office/drawing/2016/SVG/main" r:embed="rId7"/>
               </a:ext>
             </a:extLst>
           </a:blip>
@@ -15590,7 +15517,7 @@
           <a:blip>
             <a:extLst>
               <a:ext uri="{96DAC541-7B7A-43D3-8B79-37D633B846F1}">
-                <asvg:svgBlip xmlns:asvg="http://schemas.microsoft.com/office/drawing/2016/SVG/main" r:embed="rId9"/>
+                <asvg:svgBlip xmlns:asvg="http://schemas.microsoft.com/office/drawing/2016/SVG/main" r:embed="rId8"/>
               </a:ext>
             </a:extLst>
           </a:blip>
@@ -15649,7 +15576,7 @@
             <a:blip>
               <a:extLst>
                 <a:ext uri="{96DAC541-7B7A-43D3-8B79-37D633B846F1}">
-                  <asvg:svgBlip xmlns:asvg="http://schemas.microsoft.com/office/drawing/2016/SVG/main" r:embed="rId10"/>
+                  <asvg:svgBlip xmlns:asvg="http://schemas.microsoft.com/office/drawing/2016/SVG/main" r:embed="rId9"/>
                 </a:ext>
               </a:extLst>
             </a:blip>
@@ -15685,7 +15612,7 @@
             <a:blip>
               <a:extLst>
                 <a:ext uri="{96DAC541-7B7A-43D3-8B79-37D633B846F1}">
-                  <asvg:svgBlip xmlns:asvg="http://schemas.microsoft.com/office/drawing/2016/SVG/main" r:embed="rId11"/>
+                  <asvg:svgBlip xmlns:asvg="http://schemas.microsoft.com/office/drawing/2016/SVG/main" r:embed="rId10"/>
                 </a:ext>
               </a:extLst>
             </a:blip>
@@ -15722,7 +15649,7 @@
           <a:blip>
             <a:extLst>
               <a:ext uri="{96DAC541-7B7A-43D3-8B79-37D633B846F1}">
-                <asvg:svgBlip xmlns:asvg="http://schemas.microsoft.com/office/drawing/2016/SVG/main" r:embed="rId12"/>
+                <asvg:svgBlip xmlns:asvg="http://schemas.microsoft.com/office/drawing/2016/SVG/main" r:embed="rId11"/>
               </a:ext>
             </a:extLst>
           </a:blip>
@@ -15854,7 +15781,7 @@
       <p:pic>
         <p:nvPicPr>
           <p:cNvPr id="53" name="Ábra 52" descr="Telitalálat egyszínű kitöltéssel">
-            <a:hlinkClick r:id="rId13" action="ppaction://hlinksldjump"/>
+            <a:hlinkClick r:id="rId12" action="ppaction://hlinksldjump"/>
             <a:extLst>
               <a:ext uri="{FF2B5EF4-FFF2-40B4-BE49-F238E27FC236}">
                 <a16:creationId xmlns:a16="http://schemas.microsoft.com/office/drawing/2014/main" id="{2BE870D4-A530-4C55-6752-8F2856400B15}"/>
@@ -15870,7 +15797,7 @@
           <a:blip>
             <a:extLst>
               <a:ext uri="{96DAC541-7B7A-43D3-8B79-37D633B846F1}">
-                <asvg:svgBlip xmlns:asvg="http://schemas.microsoft.com/office/drawing/2016/SVG/main" r:embed="rId14"/>
+                <asvg:svgBlip xmlns:asvg="http://schemas.microsoft.com/office/drawing/2016/SVG/main" r:embed="rId13"/>
               </a:ext>
             </a:extLst>
           </a:blip>
@@ -15891,7 +15818,7 @@
       <p:pic>
         <p:nvPicPr>
           <p:cNvPr id="54" name="Ábra 53" descr="Villám egyszínű kitöltéssel">
-            <a:hlinkClick r:id="rId15" action="ppaction://hlinksldjump"/>
+            <a:hlinkClick r:id="rId14" action="ppaction://hlinksldjump"/>
             <a:extLst>
               <a:ext uri="{FF2B5EF4-FFF2-40B4-BE49-F238E27FC236}">
                 <a16:creationId xmlns:a16="http://schemas.microsoft.com/office/drawing/2014/main" id="{B06C0C7D-40FD-2D88-B636-525BC9FC251A}"/>
@@ -15907,7 +15834,7 @@
           <a:blip>
             <a:extLst>
               <a:ext uri="{96DAC541-7B7A-43D3-8B79-37D633B846F1}">
-                <asvg:svgBlip xmlns:asvg="http://schemas.microsoft.com/office/drawing/2016/SVG/main" r:embed="rId16"/>
+                <asvg:svgBlip xmlns:asvg="http://schemas.microsoft.com/office/drawing/2016/SVG/main" r:embed="rId15"/>
               </a:ext>
             </a:extLst>
           </a:blip>
@@ -15968,7 +15895,7 @@
             <a:blip>
               <a:extLst>
                 <a:ext uri="{96DAC541-7B7A-43D3-8B79-37D633B846F1}">
-                  <asvg:svgBlip xmlns:asvg="http://schemas.microsoft.com/office/drawing/2016/SVG/main" r:embed="rId17"/>
+                  <asvg:svgBlip xmlns:asvg="http://schemas.microsoft.com/office/drawing/2016/SVG/main" r:embed="rId16"/>
                 </a:ext>
               </a:extLst>
             </a:blip>
@@ -15989,7 +15916,7 @@
         <p:pic>
           <p:nvPicPr>
             <p:cNvPr id="57" name="Ábra 56" descr="Villanykörte és fogaskerék egyszínű kitöltéssel">
-              <a:hlinkClick r:id="rId18" action="ppaction://hlinksldjump"/>
+              <a:hlinkClick r:id="rId17" action="ppaction://hlinksldjump"/>
               <a:extLst>
                 <a:ext uri="{FF2B5EF4-FFF2-40B4-BE49-F238E27FC236}">
                   <a16:creationId xmlns:a16="http://schemas.microsoft.com/office/drawing/2014/main" id="{7BE20166-A36B-9F21-9148-6EEA3B6384D0}"/>
@@ -16005,7 +15932,7 @@
             <a:blip>
               <a:extLst>
                 <a:ext uri="{96DAC541-7B7A-43D3-8B79-37D633B846F1}">
-                  <asvg:svgBlip xmlns:asvg="http://schemas.microsoft.com/office/drawing/2016/SVG/main" r:embed="rId19"/>
+                  <asvg:svgBlip xmlns:asvg="http://schemas.microsoft.com/office/drawing/2016/SVG/main" r:embed="rId18"/>
                 </a:ext>
               </a:extLst>
             </a:blip>
@@ -16027,7 +15954,7 @@
       <p:pic>
         <p:nvPicPr>
           <p:cNvPr id="58" name="Ábra 57" descr="Dokumentum egyszínű kitöltéssel">
-            <a:hlinkClick r:id="rId20" action="ppaction://hlinksldjump"/>
+            <a:hlinkClick r:id="rId19" action="ppaction://hlinksldjump"/>
             <a:extLst>
               <a:ext uri="{FF2B5EF4-FFF2-40B4-BE49-F238E27FC236}">
                 <a16:creationId xmlns:a16="http://schemas.microsoft.com/office/drawing/2014/main" id="{67CDA34F-4402-33A4-F634-CAD33B067EF4}"/>
@@ -16043,7 +15970,7 @@
           <a:blip>
             <a:extLst>
               <a:ext uri="{96DAC541-7B7A-43D3-8B79-37D633B846F1}">
-                <asvg:svgBlip xmlns:asvg="http://schemas.microsoft.com/office/drawing/2016/SVG/main" r:embed="rId21"/>
+                <asvg:svgBlip xmlns:asvg="http://schemas.microsoft.com/office/drawing/2016/SVG/main" r:embed="rId20"/>
               </a:ext>
             </a:extLst>
           </a:blip>
@@ -16079,7 +16006,7 @@
           <a:blip>
             <a:extLst>
               <a:ext uri="{96DAC541-7B7A-43D3-8B79-37D633B846F1}">
-                <asvg:svgBlip xmlns:asvg="http://schemas.microsoft.com/office/drawing/2016/SVG/main" r:embed="rId22"/>
+                <asvg:svgBlip xmlns:asvg="http://schemas.microsoft.com/office/drawing/2016/SVG/main" r:embed="rId21"/>
               </a:ext>
             </a:extLst>
           </a:blip>
@@ -16546,7 +16473,7 @@
               <p:nvPr/>
             </p:nvPicPr>
             <p:blipFill>
-              <a:blip r:embed="rId23">
+              <a:blip r:embed="rId22">
                 <a:extLst>
                   <a:ext uri="{28A0092B-C50C-407E-A947-70E740481C1C}">
                     <a14:useLocalDpi xmlns:a14="http://schemas.microsoft.com/office/drawing/2010/main" val="0"/>
@@ -16669,7 +16596,7 @@
                     </a:solidFill>
                     <a:latin typeface="Arial" panose="020B0604020202020204" pitchFamily="34" charset="0"/>
                     <a:cs typeface="Arial" panose="020B0604020202020204" pitchFamily="34" charset="0"/>
-                    <a:hlinkClick r:id="rId24">
+                    <a:hlinkClick r:id="rId23">
                       <a:extLst>
                         <a:ext uri="{A12FA001-AC4F-418D-AE19-62706E023703}">
                           <ahyp:hlinkClr xmlns:ahyp="http://schemas.microsoft.com/office/drawing/2018/hyperlinkcolor" val="tx"/>
@@ -18246,146 +18173,6 @@
           </p:sp>
         </p:grpSp>
       </p:grpSp>
-      <p:pic>
-        <p:nvPicPr>
-          <p:cNvPr id="22" name="Kép 21">
-            <a:extLst>
-              <a:ext uri="{FF2B5EF4-FFF2-40B4-BE49-F238E27FC236}">
-                <a16:creationId xmlns:a16="http://schemas.microsoft.com/office/drawing/2014/main" id="{925B38B0-D5CD-9E64-6A86-028B60AD8BE6}"/>
-              </a:ext>
-            </a:extLst>
-          </p:cNvPr>
-          <p:cNvPicPr>
-            <a:picLocks noChangeAspect="1"/>
-          </p:cNvPicPr>
-          <p:nvPr/>
-        </p:nvPicPr>
-        <p:blipFill>
-          <a:blip r:embed="rId22">
-            <a:extLst>
-              <a:ext uri="{28A0092B-C50C-407E-A947-70E740481C1C}">
-                <a14:useLocalDpi xmlns:a14="http://schemas.microsoft.com/office/drawing/2010/main" val="0"/>
-              </a:ext>
-            </a:extLst>
-          </a:blip>
-          <a:stretch>
-            <a:fillRect/>
-          </a:stretch>
-        </p:blipFill>
-        <p:spPr>
-          <a:xfrm>
-            <a:off x="2200441" y="8811080"/>
-            <a:ext cx="1877060" cy="3548380"/>
-          </a:xfrm>
-          <a:prstGeom prst="rect">
-            <a:avLst/>
-          </a:prstGeom>
-        </p:spPr>
-      </p:pic>
-      <p:pic>
-        <p:nvPicPr>
-          <p:cNvPr id="23" name="Kép 22">
-            <a:extLst>
-              <a:ext uri="{FF2B5EF4-FFF2-40B4-BE49-F238E27FC236}">
-                <a16:creationId xmlns:a16="http://schemas.microsoft.com/office/drawing/2014/main" id="{21B98740-C75C-6143-07FD-ED042AB78F05}"/>
-              </a:ext>
-            </a:extLst>
-          </p:cNvPr>
-          <p:cNvPicPr>
-            <a:picLocks noChangeAspect="1"/>
-          </p:cNvPicPr>
-          <p:nvPr/>
-        </p:nvPicPr>
-        <p:blipFill>
-          <a:blip r:embed="rId23">
-            <a:extLst>
-              <a:ext uri="{28A0092B-C50C-407E-A947-70E740481C1C}">
-                <a14:useLocalDpi xmlns:a14="http://schemas.microsoft.com/office/drawing/2010/main" val="0"/>
-              </a:ext>
-            </a:extLst>
-          </a:blip>
-          <a:stretch>
-            <a:fillRect/>
-          </a:stretch>
-        </p:blipFill>
-        <p:spPr>
-          <a:xfrm>
-            <a:off x="4204675" y="9402900"/>
-            <a:ext cx="2235200" cy="2956560"/>
-          </a:xfrm>
-          <a:prstGeom prst="rect">
-            <a:avLst/>
-          </a:prstGeom>
-          <a:effectLst/>
-        </p:spPr>
-      </p:pic>
-      <p:pic>
-        <p:nvPicPr>
-          <p:cNvPr id="24" name="Kép 23">
-            <a:extLst>
-              <a:ext uri="{FF2B5EF4-FFF2-40B4-BE49-F238E27FC236}">
-                <a16:creationId xmlns:a16="http://schemas.microsoft.com/office/drawing/2014/main" id="{ECFECDD9-33AF-ED16-4216-0EBBE512C44A}"/>
-              </a:ext>
-            </a:extLst>
-          </p:cNvPr>
-          <p:cNvPicPr>
-            <a:picLocks noChangeAspect="1"/>
-          </p:cNvPicPr>
-          <p:nvPr/>
-        </p:nvPicPr>
-        <p:blipFill>
-          <a:blip r:embed="rId24"/>
-          <a:stretch>
-            <a:fillRect/>
-          </a:stretch>
-        </p:blipFill>
-        <p:spPr>
-          <a:xfrm>
-            <a:off x="6567049" y="9402900"/>
-            <a:ext cx="2630069" cy="2956560"/>
-          </a:xfrm>
-          <a:prstGeom prst="rect">
-            <a:avLst/>
-          </a:prstGeom>
-        </p:spPr>
-      </p:pic>
-      <p:pic>
-        <p:nvPicPr>
-          <p:cNvPr id="25" name="Kép 24">
-            <a:extLst>
-              <a:ext uri="{FF2B5EF4-FFF2-40B4-BE49-F238E27FC236}">
-                <a16:creationId xmlns:a16="http://schemas.microsoft.com/office/drawing/2014/main" id="{292D3199-9A58-DDBD-A0FF-DFD6C74A10BD}"/>
-              </a:ext>
-            </a:extLst>
-          </p:cNvPr>
-          <p:cNvPicPr>
-            <a:picLocks noChangeAspect="1"/>
-          </p:cNvPicPr>
-          <p:nvPr/>
-        </p:nvPicPr>
-        <p:blipFill>
-          <a:blip r:embed="rId25">
-            <a:extLst>
-              <a:ext uri="{28A0092B-C50C-407E-A947-70E740481C1C}">
-                <a14:useLocalDpi xmlns:a14="http://schemas.microsoft.com/office/drawing/2010/main" val="0"/>
-              </a:ext>
-            </a:extLst>
-          </a:blip>
-          <a:stretch>
-            <a:fillRect/>
-          </a:stretch>
-        </p:blipFill>
-        <p:spPr>
-          <a:xfrm>
-            <a:off x="9324292" y="10039805"/>
-            <a:ext cx="2236470" cy="2319655"/>
-          </a:xfrm>
-          <a:prstGeom prst="rect">
-            <a:avLst/>
-          </a:prstGeom>
-          <a:effectLst/>
-        </p:spPr>
-      </p:pic>
       <p:grpSp>
         <p:nvGrpSpPr>
           <p:cNvPr id="30" name="Csoportba foglalás 29">
@@ -18497,6 +18284,110 @@
           </p:txBody>
         </p:sp>
       </p:grpSp>
+      <p:pic>
+        <p:nvPicPr>
+          <p:cNvPr id="3" name="Kép 2">
+            <a:extLst>
+              <a:ext uri="{FF2B5EF4-FFF2-40B4-BE49-F238E27FC236}">
+                <a16:creationId xmlns:a16="http://schemas.microsoft.com/office/drawing/2014/main" id="{CF087E6B-6E7D-9F91-B561-40C1A73BA141}"/>
+              </a:ext>
+            </a:extLst>
+          </p:cNvPr>
+          <p:cNvPicPr>
+            <a:picLocks noChangeAspect="1"/>
+          </p:cNvPicPr>
+          <p:nvPr/>
+        </p:nvPicPr>
+        <p:blipFill>
+          <a:blip r:embed="rId22">
+            <a:extLst>
+              <a:ext uri="{28A0092B-C50C-407E-A947-70E740481C1C}">
+                <a14:useLocalDpi xmlns:a14="http://schemas.microsoft.com/office/drawing/2010/main" val="0"/>
+              </a:ext>
+            </a:extLst>
+          </a:blip>
+          <a:stretch>
+            <a:fillRect/>
+          </a:stretch>
+        </p:blipFill>
+        <p:spPr>
+          <a:xfrm>
+            <a:off x="2092977" y="9420976"/>
+            <a:ext cx="2923990" cy="3867642"/>
+          </a:xfrm>
+          <a:prstGeom prst="rect">
+            <a:avLst/>
+          </a:prstGeom>
+          <a:effectLst/>
+        </p:spPr>
+      </p:pic>
+      <p:pic>
+        <p:nvPicPr>
+          <p:cNvPr id="7" name="Kép 6">
+            <a:extLst>
+              <a:ext uri="{FF2B5EF4-FFF2-40B4-BE49-F238E27FC236}">
+                <a16:creationId xmlns:a16="http://schemas.microsoft.com/office/drawing/2014/main" id="{23B60979-753C-87CA-0209-EDFEB15A9530}"/>
+              </a:ext>
+            </a:extLst>
+          </p:cNvPr>
+          <p:cNvPicPr>
+            <a:picLocks noChangeAspect="1"/>
+          </p:cNvPicPr>
+          <p:nvPr/>
+        </p:nvPicPr>
+        <p:blipFill>
+          <a:blip r:embed="rId23"/>
+          <a:stretch>
+            <a:fillRect/>
+          </a:stretch>
+        </p:blipFill>
+        <p:spPr>
+          <a:xfrm>
+            <a:off x="5108131" y="9420976"/>
+            <a:ext cx="3440542" cy="3867642"/>
+          </a:xfrm>
+          <a:prstGeom prst="rect">
+            <a:avLst/>
+          </a:prstGeom>
+        </p:spPr>
+      </p:pic>
+      <p:pic>
+        <p:nvPicPr>
+          <p:cNvPr id="9" name="Kép 8">
+            <a:extLst>
+              <a:ext uri="{FF2B5EF4-FFF2-40B4-BE49-F238E27FC236}">
+                <a16:creationId xmlns:a16="http://schemas.microsoft.com/office/drawing/2014/main" id="{D4ECDFF1-6288-B8C5-5CEF-5B0C561671BE}"/>
+              </a:ext>
+            </a:extLst>
+          </p:cNvPr>
+          <p:cNvPicPr>
+            <a:picLocks noChangeAspect="1"/>
+          </p:cNvPicPr>
+          <p:nvPr/>
+        </p:nvPicPr>
+        <p:blipFill>
+          <a:blip r:embed="rId24">
+            <a:extLst>
+              <a:ext uri="{28A0092B-C50C-407E-A947-70E740481C1C}">
+                <a14:useLocalDpi xmlns:a14="http://schemas.microsoft.com/office/drawing/2010/main" val="0"/>
+              </a:ext>
+            </a:extLst>
+          </a:blip>
+          <a:stretch>
+            <a:fillRect/>
+          </a:stretch>
+        </p:blipFill>
+        <p:spPr>
+          <a:xfrm>
+            <a:off x="8639837" y="10251790"/>
+            <a:ext cx="2925652" cy="3034470"/>
+          </a:xfrm>
+          <a:prstGeom prst="rect">
+            <a:avLst/>
+          </a:prstGeom>
+          <a:effectLst/>
+        </p:spPr>
+      </p:pic>
     </p:spTree>
     <p:extLst>
       <p:ext uri="{BB962C8B-B14F-4D97-AF65-F5344CB8AC3E}">
